--- a/ppt/new hackvitrasec.pptx
+++ b/ppt/new hackvitrasec.pptx
@@ -746,7 +746,7 @@
           <a:p>
             <a:fld id="{5BDEC690-AC5B-4946-A2BC-5B2233C59C46}" type="datetimeFigureOut">
               <a:rPr lang="en-US" smtClean="0"/>
-              <a:t>23-Jul-25</a:t>
+              <a:t>25-Jul-25</a:t>
             </a:fld>
             <a:endParaRPr lang="en-US"/>
           </a:p>
@@ -935,7 +935,7 @@
           <a:p>
             <a:fld id="{5BDEC690-AC5B-4946-A2BC-5B2233C59C46}" type="datetimeFigureOut">
               <a:rPr lang="en-US" smtClean="0"/>
-              <a:t>23-Jul-25</a:t>
+              <a:t>25-Jul-25</a:t>
             </a:fld>
             <a:endParaRPr lang="en-US"/>
           </a:p>
@@ -1109,7 +1109,7 @@
           <a:p>
             <a:fld id="{5BDEC690-AC5B-4946-A2BC-5B2233C59C46}" type="datetimeFigureOut">
               <a:rPr lang="en-US" smtClean="0"/>
-              <a:t>23-Jul-25</a:t>
+              <a:t>25-Jul-25</a:t>
             </a:fld>
             <a:endParaRPr lang="en-US"/>
           </a:p>
@@ -1251,7 +1251,7 @@
           <a:p>
             <a:fld id="{5BDEC690-AC5B-4946-A2BC-5B2233C59C46}" type="datetimeFigureOut">
               <a:rPr lang="en-US" smtClean="0"/>
-              <a:t>23-Jul-25</a:t>
+              <a:t>25-Jul-25</a:t>
             </a:fld>
             <a:endParaRPr lang="en-US"/>
           </a:p>
@@ -1496,7 +1496,7 @@
           <a:p>
             <a:fld id="{5BDEC690-AC5B-4946-A2BC-5B2233C59C46}" type="datetimeFigureOut">
               <a:rPr lang="en-US" smtClean="0"/>
-              <a:t>23-Jul-25</a:t>
+              <a:t>25-Jul-25</a:t>
             </a:fld>
             <a:endParaRPr lang="en-US"/>
           </a:p>
@@ -1895,7 +1895,7 @@
           <a:p>
             <a:fld id="{5BDEC690-AC5B-4946-A2BC-5B2233C59C46}" type="datetimeFigureOut">
               <a:rPr lang="en-US" smtClean="0"/>
-              <a:t>23-Jul-25</a:t>
+              <a:t>25-Jul-25</a:t>
             </a:fld>
             <a:endParaRPr lang="en-US"/>
           </a:p>
@@ -2331,7 +2331,7 @@
           <a:p>
             <a:fld id="{5BDEC690-AC5B-4946-A2BC-5B2233C59C46}" type="datetimeFigureOut">
               <a:rPr lang="en-US" smtClean="0"/>
-              <a:t>23-Jul-25</a:t>
+              <a:t>25-Jul-25</a:t>
             </a:fld>
             <a:endParaRPr lang="en-US"/>
           </a:p>
@@ -2426,7 +2426,7 @@
           <a:p>
             <a:fld id="{5BDEC690-AC5B-4946-A2BC-5B2233C59C46}" type="datetimeFigureOut">
               <a:rPr lang="en-US" smtClean="0"/>
-              <a:t>23-Jul-25</a:t>
+              <a:t>25-Jul-25</a:t>
             </a:fld>
             <a:endParaRPr lang="en-US"/>
           </a:p>
@@ -2538,7 +2538,7 @@
           <a:p>
             <a:fld id="{5BDEC690-AC5B-4946-A2BC-5B2233C59C46}" type="datetimeFigureOut">
               <a:rPr lang="en-US" smtClean="0"/>
-              <a:t>23-Jul-25</a:t>
+              <a:t>25-Jul-25</a:t>
             </a:fld>
             <a:endParaRPr lang="en-US"/>
           </a:p>
@@ -2805,7 +2805,7 @@
           <a:p>
             <a:fld id="{5BDEC690-AC5B-4946-A2BC-5B2233C59C46}" type="datetimeFigureOut">
               <a:rPr lang="en-US" smtClean="0"/>
-              <a:t>23-Jul-25</a:t>
+              <a:t>25-Jul-25</a:t>
             </a:fld>
             <a:endParaRPr lang="en-US"/>
           </a:p>
@@ -3006,7 +3006,7 @@
           <a:p>
             <a:fld id="{5BDEC690-AC5B-4946-A2BC-5B2233C59C46}" type="datetimeFigureOut">
               <a:rPr lang="en-US" smtClean="0"/>
-              <a:t>23-Jul-25</a:t>
+              <a:t>25-Jul-25</a:t>
             </a:fld>
             <a:endParaRPr lang="en-US"/>
           </a:p>
@@ -4092,7 +4092,7 @@
           <a:p>
             <a:fld id="{5BDEC690-AC5B-4946-A2BC-5B2233C59C46}" type="datetimeFigureOut">
               <a:rPr lang="en-US" smtClean="0"/>
-              <a:t>23-Jul-25</a:t>
+              <a:t>25-Jul-25</a:t>
             </a:fld>
             <a:endParaRPr lang="en-US"/>
           </a:p>
@@ -5310,7 +5310,7 @@
             </a:r>
             <a:r>
               <a:rPr lang="en-US" sz="2400" dirty="0"/>
-              <a:t> is a creative tech agency providing cybersecurity services ,web development, UI/UX design, graphic design, digital marketing, and many </a:t>
+              <a:t> is a creative tech agency providing cybersecurity services ,web development, UI/UX design, and many </a:t>
             </a:r>
             <a:r>
               <a:rPr lang="en-US" sz="2400" dirty="0" err="1"/>
@@ -5512,7 +5512,7 @@
         <p:spPr>
           <a:xfrm>
             <a:off x="990600" y="2438400"/>
-            <a:ext cx="4883944" cy="2677656"/>
+            <a:ext cx="5943600" cy="1815882"/>
           </a:xfrm>
           <a:prstGeom prst="rect">
             <a:avLst/>
@@ -5533,32 +5533,13 @@
           <a:p>
             <a:r>
               <a:rPr lang="en-US" sz="2800" dirty="0"/>
-              <a:t>🌐 Web Development</a:t>
-            </a:r>
-          </a:p>
-          <a:p>
-            <a:r>
-              <a:rPr lang="en-US" sz="2800" dirty="0"/>
-              <a:t>🎨 Graphic Design</a:t>
-            </a:r>
-          </a:p>
-          <a:p>
-            <a:r>
-              <a:rPr lang="en-US" sz="2800" dirty="0"/>
-              <a:t>🧠 UI/UX Design</a:t>
-            </a:r>
-          </a:p>
-          <a:p>
-            <a:r>
-              <a:rPr lang="en-US" sz="2800" dirty="0"/>
-              <a:t>📢 Digital Marketing </a:t>
-            </a:r>
-          </a:p>
-          <a:p>
-            <a:r>
-              <a:rPr lang="en-US" sz="2800" dirty="0"/>
-              <a:t> </a:t>
-            </a:r>
+              <a:t>🌐 Secure Web Development</a:t>
+            </a:r>
+          </a:p>
+          <a:p>
+            <a:endParaRPr lang="en-US" sz="2800" dirty="0"/>
+          </a:p>
+          <a:p>
             <a:r>
               <a:rPr lang="en-US" sz="2800" dirty="0" err="1"/>
               <a:t>etc</a:t>
@@ -5609,7 +5590,7 @@
         <p:spPr>
           <a:xfrm>
             <a:off x="685800" y="1425339"/>
-            <a:ext cx="7696200" cy="461665"/>
+            <a:ext cx="7696200" cy="830997"/>
           </a:xfrm>
           <a:prstGeom prst="rect">
             <a:avLst/>
@@ -5632,7 +5613,7 @@
             </a:r>
             <a:r>
               <a:rPr lang="en-US" sz="2400" b="1" u="sng" dirty="0"/>
-              <a:t> for Web Development </a:t>
+              <a:t> for Secure Web Development </a:t>
             </a:r>
             <a:r>
               <a:rPr lang="en-US" sz="2400" b="1" dirty="0"/>
@@ -5654,7 +5635,7 @@
         <p:spPr>
           <a:xfrm>
             <a:off x="1447800" y="2376148"/>
-            <a:ext cx="6324600" cy="3046988"/>
+            <a:ext cx="6324600" cy="3416320"/>
           </a:xfrm>
           <a:prstGeom prst="rect">
             <a:avLst/>
@@ -5716,19 +5697,33 @@
             </a:br>
             <a:r>
               <a:rPr lang="en-US" sz="2400" dirty="0"/>
-              <a:t>📊 Integrated Marketing Support</a:t>
-            </a:r>
-            <a:br>
-              <a:rPr lang="en-US" sz="2400" dirty="0"/>
-            </a:br>
-            <a:r>
-              <a:rPr lang="en-US" sz="2400" dirty="0"/>
               <a:t>🤝 Ongoing Support &amp; Maintenance</a:t>
             </a:r>
+          </a:p>
+          <a:p>
+            <a:pPr>
+              <a:buClr>
+                <a:srgbClr val="00B0F0"/>
+              </a:buClr>
+            </a:pPr>
             <a:endParaRPr lang="en-US" sz="2400" dirty="0">
               <a:latin typeface="Times New Roman" pitchFamily="18" charset="0"/>
               <a:cs typeface="Times New Roman" pitchFamily="18" charset="0"/>
             </a:endParaRPr>
+          </a:p>
+          <a:p>
+            <a:pPr>
+              <a:buClr>
+                <a:srgbClr val="00B0F0"/>
+              </a:buClr>
+            </a:pPr>
+            <a:r>
+              <a:rPr lang="en-US" sz="2400" dirty="0">
+                <a:latin typeface="Times New Roman" pitchFamily="18" charset="0"/>
+                <a:cs typeface="Times New Roman" pitchFamily="18" charset="0"/>
+              </a:rPr>
+              <a:t>We fix coding related bug max to max.</a:t>
+            </a:r>
           </a:p>
         </p:txBody>
       </p:sp>
@@ -5868,7 +5863,7 @@
         <p:spPr>
           <a:xfrm>
             <a:off x="1371600" y="2590800"/>
-            <a:ext cx="5645944" cy="3285515"/>
+            <a:ext cx="5645944" cy="2823850"/>
           </a:xfrm>
           <a:prstGeom prst="rect">
             <a:avLst/>
@@ -5903,7 +5898,7 @@
             </a:r>
             <a:r>
               <a:rPr lang="en-US" sz="2000" b="1" dirty="0"/>
-              <a:t>Mobile App Development</a:t>
+              <a:t>Mobile App Development </a:t>
             </a:r>
             <a:br>
               <a:rPr lang="en-US" sz="2000" dirty="0"/>
@@ -5937,17 +5932,6 @@
             <a:r>
               <a:rPr lang="en-US" sz="2000" b="1" dirty="0"/>
               <a:t>Data Analytics &amp; Business Intelligence</a:t>
-            </a:r>
-            <a:br>
-              <a:rPr lang="en-US" sz="2000" dirty="0"/>
-            </a:br>
-            <a:r>
-              <a:rPr lang="en-US" sz="2000" dirty="0"/>
-              <a:t>🤝 </a:t>
-            </a:r>
-            <a:r>
-              <a:rPr lang="en-US" sz="2000" b="1" dirty="0"/>
-              <a:t>Strategic Partnerships &amp; Collaborations</a:t>
             </a:r>
             <a:br>
               <a:rPr lang="en-US" sz="2000" dirty="0"/>
